--- a/Foundation_F6/Workshop/F6-W06_Apply_Workshop_L11-L12_Welcome_to_Our_Town.pptx
+++ b/Foundation_F6/Workshop/F6-W06_Apply_Workshop_L11-L12_Welcome_to_Our_Town.pptx
@@ -7434,7 +7434,7 @@
                 <a:latin typeface="Calibri" pitchFamily="34" charset="0"/>
                 <a:cs typeface="Amiri" pitchFamily="2" charset="-78"/>
               </a:rPr>
-              <a:t>Odd numbers come from F6-L11, even numbers from F6-L12. Core: a full sentence from the starter. Develop: add the “more” part. Stretch: link two answers with </a:t>
+              <a:t>Odd numbers come from F6-L11, even numbers from F6-L12. Core: a full sentence from the starter. Develop: add the “more” part. Stretch: link two answers with ‏</a:t>
             </a:r>
             <a:pPr algn="l" indent="0" marL="0">
               <a:buNone/>
@@ -7461,7 +7461,7 @@
                 <a:latin typeface="Calibri" pitchFamily="34" charset="0"/>
                 <a:cs typeface="Amiri" pitchFamily="2" charset="-78"/>
               </a:rPr>
-              <a:t>, </a:t>
+              <a:t>‏, ‏</a:t>
             </a:r>
             <a:pPr algn="l" indent="0" marL="0">
               <a:buNone/>
@@ -7488,7 +7488,7 @@
                 <a:latin typeface="Calibri" pitchFamily="34" charset="0"/>
                 <a:cs typeface="Amiri" pitchFamily="2" charset="-78"/>
               </a:rPr>
-              <a:t> or </a:t>
+              <a:t>‏ or ‏</a:t>
             </a:r>
             <a:pPr algn="l" indent="0" marL="0">
               <a:buNone/>
@@ -7515,7 +7515,7 @@
                 <a:latin typeface="Calibri" pitchFamily="34" charset="0"/>
                 <a:cs typeface="Amiri" pitchFamily="2" charset="-78"/>
               </a:rPr>
-              <a:t>. Swap after each question.</a:t>
+              <a:t>‏. Swap after each question.</a:t>
             </a:r>
             <a:endParaRPr lang="en-US" sz="1100" dirty="0"/>
           </a:p>
@@ -10838,7 +10838,7 @@
                 <a:latin typeface="Calibri" pitchFamily="34" charset="0"/>
                 <a:cs typeface="Amiri" pitchFamily="2" charset="-78"/>
               </a:rPr>
-              <a:t>Add a building (</a:t>
+              <a:t>Add a building (‏</a:t>
             </a:r>
             <a:pPr algn="l" indent="0" marL="0">
               <a:buNone/>
@@ -10865,7 +10865,7 @@
                 <a:latin typeface="Calibri" pitchFamily="34" charset="0"/>
                 <a:cs typeface="Amiri" pitchFamily="2" charset="-78"/>
               </a:rPr>
-              <a:t> …) and one advantage.</a:t>
+              <a:t> …‏) and one advantage.</a:t>
             </a:r>
             <a:endParaRPr lang="en-US" sz="1150" dirty="0"/>
           </a:p>
@@ -11002,7 +11002,7 @@
                 <a:latin typeface="Calibri" pitchFamily="34" charset="0"/>
                 <a:cs typeface="Amiri" pitchFamily="2" charset="-78"/>
               </a:rPr>
-              <a:t>Use all four families, including group commands: </a:t>
+              <a:t>Use all four families, including group commands: ‏</a:t>
             </a:r>
             <a:pPr algn="l" indent="0" marL="0">
               <a:buNone/>
@@ -11083,7 +11083,7 @@
                 <a:latin typeface="Calibri" pitchFamily="34" charset="0"/>
                 <a:cs typeface="Amiri" pitchFamily="2" charset="-78"/>
               </a:rPr>
-              <a:t>.</a:t>
+              <a:t>‏.</a:t>
             </a:r>
             <a:endParaRPr lang="en-US" sz="1150" dirty="0"/>
           </a:p>
@@ -17642,7 +17642,7 @@
                 <a:latin typeface="Calibri" pitchFamily="34" charset="0"/>
                 <a:cs typeface="Amiri" pitchFamily="2" charset="-78"/>
               </a:rPr>
-              <a:t>Feminine → </a:t>
+              <a:t>Feminine → ‏</a:t>
             </a:r>
             <a:pPr algn="l" indent="0" marL="0">
               <a:buNone/>
@@ -17669,7 +17669,7 @@
                 <a:latin typeface="Calibri" pitchFamily="34" charset="0"/>
                 <a:cs typeface="Amiri" pitchFamily="2" charset="-78"/>
               </a:rPr>
-              <a:t>.</a:t>
+              <a:t>‏.</a:t>
             </a:r>
             <a:endParaRPr lang="en-US" sz="1150" dirty="0"/>
           </a:p>
@@ -17880,7 +17880,7 @@
                 <a:latin typeface="Calibri" pitchFamily="34" charset="0"/>
                 <a:cs typeface="Amiri" pitchFamily="2" charset="-78"/>
               </a:rPr>
-              <a:t>Repair: on foot = </a:t>
+              <a:t>Repair: on foot = ‏</a:t>
             </a:r>
             <a:pPr algn="l" indent="0" marL="0">
               <a:buNone/>
@@ -17907,7 +17907,7 @@
                 <a:latin typeface="Calibri" pitchFamily="34" charset="0"/>
                 <a:cs typeface="Amiri" pitchFamily="2" charset="-78"/>
               </a:rPr>
-              <a:t>.</a:t>
+              <a:t>‏.</a:t>
             </a:r>
             <a:endParaRPr lang="en-US" sz="1150" dirty="0"/>
           </a:p>
@@ -19955,7 +19955,7 @@
                 <a:latin typeface="Calibri" pitchFamily="34" charset="0"/>
                 <a:cs typeface="Amiri" pitchFamily="2" charset="-78"/>
               </a:rPr>
-              <a:t>Write a welcome guide (about 55–75 words) for the visiting students. Include: • places with </a:t>
+              <a:t>Write a welcome guide (about 55–75 words) for the visiting students. Include: • places with ‏</a:t>
             </a:r>
             <a:pPr algn="l" indent="0" marL="0">
               <a:buNone/>
@@ -19982,7 +19982,7 @@
                 <a:latin typeface="Calibri" pitchFamily="34" charset="0"/>
                 <a:cs typeface="Amiri" pitchFamily="2" charset="-78"/>
               </a:rPr>
-              <a:t> and positions • how to travel around and how long it takes • one building and what it is built of • one advantage and one disadvantage of the town • a route to one place with group commands. Then underline one example of each F6 grammar family.</a:t>
+              <a:t>‏ and positions • how to travel around and how long it takes • one building and what it is built of • one advantage and one disadvantage of the town • a route to one place with group commands. Then underline one example of each F6 grammar family.</a:t>
             </a:r>
             <a:endParaRPr lang="en-US" sz="1100" dirty="0"/>
           </a:p>
@@ -20134,7 +20134,7 @@
                 <a:latin typeface="Calibri" pitchFamily="34" charset="0"/>
                 <a:cs typeface="Amiri" pitchFamily="2" charset="-78"/>
               </a:rPr>
-              <a:t>☐  At least one </a:t>
+              <a:t>☐  At least one ‏</a:t>
             </a:r>
             <a:pPr algn="l" indent="0" marL="0">
               <a:buNone/>
@@ -20161,7 +20161,7 @@
                 <a:latin typeface="Calibri" pitchFamily="34" charset="0"/>
                 <a:cs typeface="Amiri" pitchFamily="2" charset="-78"/>
               </a:rPr>
-              <a:t> and one </a:t>
+              <a:t>‏ and one ‏</a:t>
             </a:r>
             <a:pPr algn="l" indent="0" marL="0">
               <a:buNone/>
@@ -20188,7 +20188,7 @@
                 <a:latin typeface="Calibri" pitchFamily="34" charset="0"/>
                 <a:cs typeface="Amiri" pitchFamily="2" charset="-78"/>
               </a:rPr>
-              <a:t> (Develop).</a:t>
+              <a:t>‏ (Develop).</a:t>
             </a:r>
             <a:endParaRPr lang="en-US" sz="1200" dirty="0"/>
           </a:p>
@@ -23736,7 +23736,7 @@
                 <a:latin typeface="Calibri" pitchFamily="34" charset="0"/>
                 <a:cs typeface="Amiri" pitchFamily="2" charset="-78"/>
               </a:rPr>
-              <a:t>get the F6 agreements right (</a:t>
+              <a:t>get the F6 agreements right (‏</a:t>
             </a:r>
             <a:pPr algn="l" indent="0" marL="0">
               <a:buNone/>
@@ -23790,7 +23790,7 @@
                 <a:latin typeface="Calibri" pitchFamily="34" charset="0"/>
                 <a:cs typeface="Amiri" pitchFamily="2" charset="-78"/>
               </a:rPr>
-              <a:t> · commands)?</a:t>
+              <a:t>‏ · commands)?</a:t>
             </a:r>
             <a:endParaRPr lang="en-US" sz="1100" dirty="0"/>
           </a:p>
@@ -23949,7 +23949,7 @@
                 <a:latin typeface="Calibri" pitchFamily="34" charset="0"/>
                 <a:cs typeface="Amiri" pitchFamily="2" charset="-78"/>
               </a:rPr>
-              <a:t>use linking words (</a:t>
+              <a:t>use linking words (‏</a:t>
             </a:r>
             <a:pPr algn="l" indent="0" marL="0">
               <a:buNone/>
@@ -24057,7 +24057,7 @@
                 <a:latin typeface="Calibri" pitchFamily="34" charset="0"/>
                 <a:cs typeface="Amiri" pitchFamily="2" charset="-78"/>
               </a:rPr>
-              <a:t>)?</a:t>
+              <a:t>‏)?</a:t>
             </a:r>
             <a:endParaRPr lang="en-US" sz="1100" dirty="0"/>
           </a:p>
@@ -28003,7 +28003,7 @@
                 <a:latin typeface="Calibri" pitchFamily="34" charset="0"/>
                 <a:cs typeface="Amiri" pitchFamily="2" charset="-78"/>
               </a:rPr>
-              <a:t>I added reasons (</a:t>
+              <a:t>I added reasons (‏</a:t>
             </a:r>
             <a:pPr algn="l" indent="0" marL="0">
               <a:buNone/>
@@ -28030,7 +28030,7 @@
                 <a:latin typeface="Calibri" pitchFamily="34" charset="0"/>
                 <a:cs typeface="Amiri" pitchFamily="2" charset="-78"/>
               </a:rPr>
-              <a:t>) and extra details without frames.</a:t>
+              <a:t>‏) and extra details without frames.</a:t>
             </a:r>
             <a:endParaRPr lang="en-US" sz="1300" dirty="0"/>
           </a:p>
@@ -32158,7 +32158,7 @@
                 <a:latin typeface="Calibri" pitchFamily="34" charset="0"/>
                 <a:cs typeface="Amiri" pitchFamily="2" charset="-78"/>
               </a:rPr>
-              <a:t>☐  Add a reason (</a:t>
+              <a:t>☐  Add a reason (‏</a:t>
             </a:r>
             <a:pPr algn="l" indent="0" marL="0">
               <a:buNone/>
@@ -32185,7 +32185,7 @@
                 <a:latin typeface="Calibri" pitchFamily="34" charset="0"/>
                 <a:cs typeface="Amiri" pitchFamily="2" charset="-78"/>
               </a:rPr>
-              <a:t>) and an extra detail to every point.</a:t>
+              <a:t>‏) and an extra detail to every point.</a:t>
             </a:r>
             <a:endParaRPr lang="en-US" sz="1300" dirty="0"/>
           </a:p>
@@ -33706,7 +33706,7 @@
                 <a:latin typeface="Calibri" pitchFamily="34" charset="0"/>
                 <a:cs typeface="Amiri" pitchFamily="2" charset="-78"/>
               </a:rPr>
-              <a:t>Join a word from each lesson in one sentence with </a:t>
+              <a:t>Join a word from each lesson in one sentence with ‏</a:t>
             </a:r>
             <a:pPr algn="l" indent="0" marL="0">
               <a:buNone/>
@@ -33733,7 +33733,7 @@
                 <a:latin typeface="Calibri" pitchFamily="34" charset="0"/>
                 <a:cs typeface="Amiri" pitchFamily="2" charset="-78"/>
               </a:rPr>
-              <a:t> or </a:t>
+              <a:t>‏ or ‏</a:t>
             </a:r>
             <a:pPr algn="l" indent="0" marL="0">
               <a:buNone/>
@@ -33760,7 +33760,7 @@
                 <a:latin typeface="Calibri" pitchFamily="34" charset="0"/>
                 <a:cs typeface="Amiri" pitchFamily="2" charset="-78"/>
               </a:rPr>
-              <a:t>.</a:t>
+              <a:t>‏.</a:t>
             </a:r>
             <a:endParaRPr lang="en-US" sz="1150" dirty="0"/>
           </a:p>
